--- a/finalreports/retail_inventory_capstone.pptx
+++ b/finalreports/retail_inventory_capstone.pptx
@@ -138,7 +138,7 @@
 <file path=ppt/revisionInfo.xml><?xml version="1.0" encoding="utf-8"?>
 <p1510:revInfo xmlns:a="http://schemas.openxmlformats.org/drawingml/2006/main" xmlns:r="http://schemas.openxmlformats.org/officeDocument/2006/relationships" xmlns:p1510="http://schemas.microsoft.com/office/powerpoint/2015/10/main">
   <p1510:revLst>
-    <p1510:client id="{A2A82979-0415-4F66-A4C5-B1864EFBAFE5}" v="123" dt="2026-03-24T16:18:39.775"/>
+    <p1510:client id="{A2A82979-0415-4F66-A4C5-B1864EFBAFE5}" v="7" dt="2026-04-01T14:41:42.842"/>
   </p1510:revLst>
 </p1510:revInfo>
 </file>
@@ -148,12 +148,12 @@
   <pc:docChgLst>
     <pc:chgData name="kkoza90210@gmail.com" userId="9d53b8651bab0e02" providerId="LiveId" clId="{F99070D4-0EC4-40BF-9298-F753368A74B3}"/>
     <pc:docChg chg="undo custSel addSld delSld modSld">
-      <pc:chgData name="kkoza90210@gmail.com" userId="9d53b8651bab0e02" providerId="LiveId" clId="{F99070D4-0EC4-40BF-9298-F753368A74B3}" dt="2026-03-24T16:19:16.441" v="916" actId="20577"/>
+      <pc:chgData name="kkoza90210@gmail.com" userId="9d53b8651bab0e02" providerId="LiveId" clId="{F99070D4-0EC4-40BF-9298-F753368A74B3}" dt="2026-04-01T14:40:05.523" v="953"/>
       <pc:docMkLst>
         <pc:docMk/>
       </pc:docMkLst>
       <pc:sldChg chg="modSp mod">
-        <pc:chgData name="kkoza90210@gmail.com" userId="9d53b8651bab0e02" providerId="LiveId" clId="{F99070D4-0EC4-40BF-9298-F753368A74B3}" dt="2026-03-24T16:18:39.775" v="910"/>
+        <pc:chgData name="kkoza90210@gmail.com" userId="9d53b8651bab0e02" providerId="LiveId" clId="{F99070D4-0EC4-40BF-9298-F753368A74B3}" dt="2026-04-01T14:40:05.523" v="953"/>
         <pc:sldMkLst>
           <pc:docMk/>
           <pc:sldMk cId="0" sldId="256"/>
@@ -167,7 +167,7 @@
           </ac:spMkLst>
         </pc:spChg>
         <pc:spChg chg="mod">
-          <ac:chgData name="kkoza90210@gmail.com" userId="9d53b8651bab0e02" providerId="LiveId" clId="{F99070D4-0EC4-40BF-9298-F753368A74B3}" dt="2026-03-24T16:18:39.775" v="910"/>
+          <ac:chgData name="kkoza90210@gmail.com" userId="9d53b8651bab0e02" providerId="LiveId" clId="{F99070D4-0EC4-40BF-9298-F753368A74B3}" dt="2026-04-01T14:40:05.523" v="953"/>
           <ac:spMkLst>
             <pc:docMk/>
             <pc:sldMk cId="0" sldId="256"/>
@@ -197,22 +197,6 @@
             <ac:spMk id="3" creationId="{00000000-0000-0000-0000-000000000000}"/>
           </ac:spMkLst>
         </pc:spChg>
-        <pc:spChg chg="add">
-          <ac:chgData name="kkoza90210@gmail.com" userId="9d53b8651bab0e02" providerId="LiveId" clId="{F99070D4-0EC4-40BF-9298-F753368A74B3}" dt="2026-03-24T15:29:44.667" v="0"/>
-          <ac:spMkLst>
-            <pc:docMk/>
-            <pc:sldMk cId="0" sldId="257"/>
-            <ac:spMk id="4" creationId="{A4A5E821-FE06-1FF1-962F-1BCC54EC6870}"/>
-          </ac:spMkLst>
-        </pc:spChg>
-        <pc:spChg chg="add mod">
-          <ac:chgData name="kkoza90210@gmail.com" userId="9d53b8651bab0e02" providerId="LiveId" clId="{F99070D4-0EC4-40BF-9298-F753368A74B3}" dt="2026-03-24T15:31:20.073" v="121"/>
-          <ac:spMkLst>
-            <pc:docMk/>
-            <pc:sldMk cId="0" sldId="257"/>
-            <ac:spMk id="5" creationId="{D0E2C66B-C7C2-A484-C65D-BAFC950D4F2A}"/>
-          </ac:spMkLst>
-        </pc:spChg>
       </pc:sldChg>
       <pc:sldChg chg="addSp modSp mod">
         <pc:chgData name="kkoza90210@gmail.com" userId="9d53b8651bab0e02" providerId="LiveId" clId="{F99070D4-0EC4-40BF-9298-F753368A74B3}" dt="2026-03-24T16:18:39.775" v="910"/>
@@ -234,14 +218,6 @@
             <pc:docMk/>
             <pc:sldMk cId="0" sldId="258"/>
             <ac:spMk id="3" creationId="{00000000-0000-0000-0000-000000000000}"/>
-          </ac:spMkLst>
-        </pc:spChg>
-        <pc:spChg chg="add">
-          <ac:chgData name="kkoza90210@gmail.com" userId="9d53b8651bab0e02" providerId="LiveId" clId="{F99070D4-0EC4-40BF-9298-F753368A74B3}" dt="2026-03-24T15:33:51.196" v="227"/>
-          <ac:spMkLst>
-            <pc:docMk/>
-            <pc:sldMk cId="0" sldId="258"/>
-            <ac:spMk id="4" creationId="{FFD426A8-626B-D112-CAAE-337CD14BC378}"/>
           </ac:spMkLst>
         </pc:spChg>
       </pc:sldChg>
@@ -290,102 +266,6 @@
             <ac:spMk id="3" creationId="{00000000-0000-0000-0000-000000000000}"/>
           </ac:spMkLst>
         </pc:spChg>
-        <pc:spChg chg="add del">
-          <ac:chgData name="kkoza90210@gmail.com" userId="9d53b8651bab0e02" providerId="LiveId" clId="{F99070D4-0EC4-40BF-9298-F753368A74B3}" dt="2026-03-24T16:11:20.619" v="859" actId="26606"/>
-          <ac:spMkLst>
-            <pc:docMk/>
-            <pc:sldMk cId="0" sldId="260"/>
-            <ac:spMk id="5" creationId="{83030214-227F-42DB-9282-BBA6AF8D94A8}"/>
-          </ac:spMkLst>
-        </pc:spChg>
-        <pc:spChg chg="add del">
-          <ac:chgData name="kkoza90210@gmail.com" userId="9d53b8651bab0e02" providerId="LiveId" clId="{F99070D4-0EC4-40BF-9298-F753368A74B3}" dt="2026-03-24T16:11:20.619" v="859" actId="26606"/>
-          <ac:spMkLst>
-            <pc:docMk/>
-            <pc:sldMk cId="0" sldId="260"/>
-            <ac:spMk id="6" creationId="{0D7A9289-BAD1-4A78-979F-A655C886DBF5}"/>
-          </ac:spMkLst>
-        </pc:spChg>
-        <pc:spChg chg="add del">
-          <ac:chgData name="kkoza90210@gmail.com" userId="9d53b8651bab0e02" providerId="LiveId" clId="{F99070D4-0EC4-40BF-9298-F753368A74B3}" dt="2026-03-24T15:38:31.754" v="256"/>
-          <ac:spMkLst>
-            <pc:docMk/>
-            <pc:sldMk cId="0" sldId="260"/>
-            <ac:spMk id="8" creationId="{3A9C15D4-2EE7-4D05-B87C-91D1F3B9604B}"/>
-          </ac:spMkLst>
-        </pc:spChg>
-        <pc:spChg chg="add del">
-          <ac:chgData name="kkoza90210@gmail.com" userId="9d53b8651bab0e02" providerId="LiveId" clId="{F99070D4-0EC4-40BF-9298-F753368A74B3}" dt="2026-03-24T16:11:22.718" v="861" actId="26606"/>
-          <ac:spMkLst>
-            <pc:docMk/>
-            <pc:sldMk cId="0" sldId="260"/>
-            <ac:spMk id="9" creationId="{CD306B45-25EE-434D-ABA9-A27B79320CFF}"/>
-          </ac:spMkLst>
-        </pc:spChg>
-        <pc:spChg chg="add del">
-          <ac:chgData name="kkoza90210@gmail.com" userId="9d53b8651bab0e02" providerId="LiveId" clId="{F99070D4-0EC4-40BF-9298-F753368A74B3}" dt="2026-03-24T15:38:31.754" v="256"/>
-          <ac:spMkLst>
-            <pc:docMk/>
-            <pc:sldMk cId="0" sldId="260"/>
-            <ac:spMk id="10" creationId="{4ED7B0FB-9654-4441-9545-02D458B68620}"/>
-          </ac:spMkLst>
-        </pc:spChg>
-        <pc:spChg chg="add del">
-          <ac:chgData name="kkoza90210@gmail.com" userId="9d53b8651bab0e02" providerId="LiveId" clId="{F99070D4-0EC4-40BF-9298-F753368A74B3}" dt="2026-03-24T16:11:22.718" v="861" actId="26606"/>
-          <ac:spMkLst>
-            <pc:docMk/>
-            <pc:sldMk cId="0" sldId="260"/>
-            <ac:spMk id="11" creationId="{0A42F85E-4939-431E-8B4A-EC07C8E0AB65}"/>
-          </ac:spMkLst>
-        </pc:spChg>
-        <pc:spChg chg="add del">
-          <ac:chgData name="kkoza90210@gmail.com" userId="9d53b8651bab0e02" providerId="LiveId" clId="{F99070D4-0EC4-40BF-9298-F753368A74B3}" dt="2026-03-24T16:13:09.319" v="866"/>
-          <ac:spMkLst>
-            <pc:docMk/>
-            <pc:sldMk cId="0" sldId="260"/>
-            <ac:spMk id="29" creationId="{83030214-227F-42DB-9282-BBA6AF8D94A8}"/>
-          </ac:spMkLst>
-        </pc:spChg>
-        <pc:spChg chg="add del">
-          <ac:chgData name="kkoza90210@gmail.com" userId="9d53b8651bab0e02" providerId="LiveId" clId="{F99070D4-0EC4-40BF-9298-F753368A74B3}" dt="2026-03-24T16:13:09.319" v="866"/>
-          <ac:spMkLst>
-            <pc:docMk/>
-            <pc:sldMk cId="0" sldId="260"/>
-            <ac:spMk id="30" creationId="{0D7A9289-BAD1-4A78-979F-A655C886DBF5}"/>
-          </ac:spMkLst>
-        </pc:spChg>
-        <pc:grpChg chg="add del">
-          <ac:chgData name="kkoza90210@gmail.com" userId="9d53b8651bab0e02" providerId="LiveId" clId="{F99070D4-0EC4-40BF-9298-F753368A74B3}" dt="2026-03-24T16:11:22.718" v="861" actId="26606"/>
-          <ac:grpSpMkLst>
-            <pc:docMk/>
-            <pc:sldMk cId="0" sldId="260"/>
-            <ac:grpSpMk id="27" creationId="{5D2B17EF-74EB-4C33-B2E2-8E727B2E7D68}"/>
-          </ac:grpSpMkLst>
-        </pc:grpChg>
-        <pc:picChg chg="add del">
-          <ac:chgData name="kkoza90210@gmail.com" userId="9d53b8651bab0e02" providerId="LiveId" clId="{F99070D4-0EC4-40BF-9298-F753368A74B3}" dt="2026-03-24T15:38:31.754" v="256"/>
-          <ac:picMkLst>
-            <pc:docMk/>
-            <pc:sldMk cId="0" sldId="260"/>
-            <ac:picMk id="12" creationId="{7BB94C57-FDF3-45A3-9D1F-904523D795D4}"/>
-          </ac:picMkLst>
-        </pc:picChg>
-        <pc:picChg chg="add del">
-          <ac:chgData name="kkoza90210@gmail.com" userId="9d53b8651bab0e02" providerId="LiveId" clId="{F99070D4-0EC4-40BF-9298-F753368A74B3}" dt="2026-03-24T15:38:31.754" v="256"/>
-          <ac:picMkLst>
-            <pc:docMk/>
-            <pc:sldMk cId="0" sldId="260"/>
-            <ac:picMk id="14" creationId="{6AEBDF1A-221A-4497-BBA9-57A70D161510}"/>
-          </ac:picMkLst>
-        </pc:picChg>
-        <pc:cxnChg chg="add del">
-          <ac:chgData name="kkoza90210@gmail.com" userId="9d53b8651bab0e02" providerId="LiveId" clId="{F99070D4-0EC4-40BF-9298-F753368A74B3}" dt="2026-03-24T16:11:22.718" v="861" actId="26606"/>
-          <ac:cxnSpMkLst>
-            <pc:docMk/>
-            <pc:sldMk cId="0" sldId="260"/>
-            <ac:cxnSpMk id="13" creationId="{27EBB3F9-D6F7-4F6A-8843-9FEBA15E4969}"/>
-          </ac:cxnSpMkLst>
-        </pc:cxnChg>
       </pc:sldChg>
       <pc:sldChg chg="modSp mod">
         <pc:chgData name="kkoza90210@gmail.com" userId="9d53b8651bab0e02" providerId="LiveId" clId="{F99070D4-0EC4-40BF-9298-F753368A74B3}" dt="2026-03-24T16:18:39.775" v="910"/>
@@ -455,54 +335,6 @@
             <ac:spMk id="3" creationId="{00000000-0000-0000-0000-000000000000}"/>
           </ac:spMkLst>
         </pc:spChg>
-        <pc:spChg chg="add del">
-          <ac:chgData name="kkoza90210@gmail.com" userId="9d53b8651bab0e02" providerId="LiveId" clId="{F99070D4-0EC4-40BF-9298-F753368A74B3}" dt="2026-03-24T16:13:09.319" v="866"/>
-          <ac:spMkLst>
-            <pc:docMk/>
-            <pc:sldMk cId="0" sldId="263"/>
-            <ac:spMk id="5" creationId="{83030214-227F-42DB-9282-BBA6AF8D94A8}"/>
-          </ac:spMkLst>
-        </pc:spChg>
-        <pc:spChg chg="add del">
-          <ac:chgData name="kkoza90210@gmail.com" userId="9d53b8651bab0e02" providerId="LiveId" clId="{F99070D4-0EC4-40BF-9298-F753368A74B3}" dt="2026-03-24T16:13:09.319" v="866"/>
-          <ac:spMkLst>
-            <pc:docMk/>
-            <pc:sldMk cId="0" sldId="263"/>
-            <ac:spMk id="6" creationId="{0D7A9289-BAD1-4A78-979F-A655C886DBF5}"/>
-          </ac:spMkLst>
-        </pc:spChg>
-        <pc:spChg chg="add del">
-          <ac:chgData name="kkoza90210@gmail.com" userId="9d53b8651bab0e02" providerId="LiveId" clId="{F99070D4-0EC4-40BF-9298-F753368A74B3}" dt="2026-03-24T15:47:00.343" v="332"/>
-          <ac:spMkLst>
-            <pc:docMk/>
-            <pc:sldMk cId="0" sldId="263"/>
-            <ac:spMk id="8" creationId="{3A9C15D4-2EE7-4D05-B87C-91D1F3B9604B}"/>
-          </ac:spMkLst>
-        </pc:spChg>
-        <pc:spChg chg="add del">
-          <ac:chgData name="kkoza90210@gmail.com" userId="9d53b8651bab0e02" providerId="LiveId" clId="{F99070D4-0EC4-40BF-9298-F753368A74B3}" dt="2026-03-24T15:47:00.343" v="332"/>
-          <ac:spMkLst>
-            <pc:docMk/>
-            <pc:sldMk cId="0" sldId="263"/>
-            <ac:spMk id="10" creationId="{4ED7B0FB-9654-4441-9545-02D458B68620}"/>
-          </ac:spMkLst>
-        </pc:spChg>
-        <pc:picChg chg="add del">
-          <ac:chgData name="kkoza90210@gmail.com" userId="9d53b8651bab0e02" providerId="LiveId" clId="{F99070D4-0EC4-40BF-9298-F753368A74B3}" dt="2026-03-24T15:47:00.343" v="332"/>
-          <ac:picMkLst>
-            <pc:docMk/>
-            <pc:sldMk cId="0" sldId="263"/>
-            <ac:picMk id="12" creationId="{7BB94C57-FDF3-45A3-9D1F-904523D795D4}"/>
-          </ac:picMkLst>
-        </pc:picChg>
-        <pc:picChg chg="add del">
-          <ac:chgData name="kkoza90210@gmail.com" userId="9d53b8651bab0e02" providerId="LiveId" clId="{F99070D4-0EC4-40BF-9298-F753368A74B3}" dt="2026-03-24T15:47:00.343" v="332"/>
-          <ac:picMkLst>
-            <pc:docMk/>
-            <pc:sldMk cId="0" sldId="263"/>
-            <ac:picMk id="14" creationId="{6AEBDF1A-221A-4497-BBA9-57A70D161510}"/>
-          </ac:picMkLst>
-        </pc:picChg>
       </pc:sldChg>
       <pc:sldChg chg="modSp mod">
         <pc:chgData name="kkoza90210@gmail.com" userId="9d53b8651bab0e02" providerId="LiveId" clId="{F99070D4-0EC4-40BF-9298-F753368A74B3}" dt="2026-03-24T16:18:05.728" v="909"/>
@@ -547,22 +379,6 @@
             <pc:docMk/>
             <pc:sldMk cId="0" sldId="265"/>
             <ac:spMk id="3" creationId="{00000000-0000-0000-0000-000000000000}"/>
-          </ac:spMkLst>
-        </pc:spChg>
-        <pc:spChg chg="add">
-          <ac:chgData name="kkoza90210@gmail.com" userId="9d53b8651bab0e02" providerId="LiveId" clId="{F99070D4-0EC4-40BF-9298-F753368A74B3}" dt="2026-03-24T15:50:50.623" v="358"/>
-          <ac:spMkLst>
-            <pc:docMk/>
-            <pc:sldMk cId="0" sldId="265"/>
-            <ac:spMk id="4" creationId="{89FDF834-DB44-AF1A-681F-FEF920DD6B1F}"/>
-          </ac:spMkLst>
-        </pc:spChg>
-        <pc:spChg chg="add">
-          <ac:chgData name="kkoza90210@gmail.com" userId="9d53b8651bab0e02" providerId="LiveId" clId="{F99070D4-0EC4-40BF-9298-F753368A74B3}" dt="2026-03-24T15:50:56.101" v="359"/>
-          <ac:spMkLst>
-            <pc:docMk/>
-            <pc:sldMk cId="0" sldId="265"/>
-            <ac:spMk id="6" creationId="{0DE6B9A3-7F08-6B76-B78F-9D7AC9CE81EC}"/>
           </ac:spMkLst>
         </pc:spChg>
       </pc:sldChg>
@@ -635,13 +451,6 @@
           </ac:spMkLst>
         </pc:spChg>
       </pc:sldChg>
-      <pc:sldChg chg="new del">
-        <pc:chgData name="kkoza90210@gmail.com" userId="9d53b8651bab0e02" providerId="LiveId" clId="{F99070D4-0EC4-40BF-9298-F753368A74B3}" dt="2026-03-24T16:13:34.888" v="868" actId="680"/>
-        <pc:sldMkLst>
-          <pc:docMk/>
-          <pc:sldMk cId="474621008" sldId="269"/>
-        </pc:sldMkLst>
-      </pc:sldChg>
     </pc:docChg>
   </pc:docChgLst>
 </pc:chgInfo>
@@ -835,7 +644,7 @@
           <a:p>
             <a:fld id="{5BCAD085-E8A6-8845-BD4E-CB4CCA059FC4}" type="datetimeFigureOut">
               <a:rPr lang="en-US" smtClean="0"/>
-              <a:t>3/24/2026</a:t>
+              <a:t>4/1/2026</a:t>
             </a:fld>
             <a:endParaRPr lang="en-US"/>
           </a:p>
@@ -935,6 +744,13 @@
             <a:noFill/>
           </a:ln>
         </p:spPr>
+        <p:txBody>
+          <a:bodyPr/>
+          <a:lstStyle/>
+          <a:p>
+            <a:endParaRPr lang="en-US"/>
+          </a:p>
+        </p:txBody>
       </p:sp>
       <p:sp>
         <p:nvSpPr>
@@ -1167,7 +983,7 @@
           <a:p>
             <a:fld id="{5BCAD085-E8A6-8845-BD4E-CB4CCA059FC4}" type="datetimeFigureOut">
               <a:rPr lang="en-US" smtClean="0"/>
-              <a:t>3/24/2026</a:t>
+              <a:t>4/1/2026</a:t>
             </a:fld>
             <a:endParaRPr lang="en-US"/>
           </a:p>
@@ -1271,6 +1087,13 @@
             <a:noFill/>
           </a:ln>
         </p:spPr>
+        <p:txBody>
+          <a:bodyPr/>
+          <a:lstStyle/>
+          <a:p>
+            <a:endParaRPr lang="en-US"/>
+          </a:p>
+        </p:txBody>
       </p:sp>
       <p:sp>
         <p:nvSpPr>
@@ -1566,7 +1389,7 @@
           <a:p>
             <a:fld id="{5BCAD085-E8A6-8845-BD4E-CB4CCA059FC4}" type="datetimeFigureOut">
               <a:rPr lang="en-US" smtClean="0"/>
-              <a:t>3/24/2026</a:t>
+              <a:t>4/1/2026</a:t>
             </a:fld>
             <a:endParaRPr lang="en-US"/>
           </a:p>
@@ -1670,6 +1493,13 @@
             <a:noFill/>
           </a:ln>
         </p:spPr>
+        <p:txBody>
+          <a:bodyPr/>
+          <a:lstStyle/>
+          <a:p>
+            <a:endParaRPr lang="en-US"/>
+          </a:p>
+        </p:txBody>
       </p:sp>
       <p:sp>
         <p:nvSpPr>
@@ -1900,7 +1730,7 @@
           <a:p>
             <a:fld id="{5BCAD085-E8A6-8845-BD4E-CB4CCA059FC4}" type="datetimeFigureOut">
               <a:rPr lang="en-US" smtClean="0"/>
-              <a:t>3/24/2026</a:t>
+              <a:t>4/1/2026</a:t>
             </a:fld>
             <a:endParaRPr lang="en-US"/>
           </a:p>
@@ -2004,6 +1834,13 @@
             <a:noFill/>
           </a:ln>
         </p:spPr>
+        <p:txBody>
+          <a:bodyPr/>
+          <a:lstStyle/>
+          <a:p>
+            <a:endParaRPr lang="en-US"/>
+          </a:p>
+        </p:txBody>
       </p:sp>
       <p:sp>
         <p:nvSpPr>
@@ -2218,7 +2055,7 @@
           <a:p>
             <a:fld id="{5BCAD085-E8A6-8845-BD4E-CB4CCA059FC4}" type="datetimeFigureOut">
               <a:rPr lang="en-US" smtClean="0"/>
-              <a:t>3/24/2026</a:t>
+              <a:t>4/1/2026</a:t>
             </a:fld>
             <a:endParaRPr lang="en-US"/>
           </a:p>
@@ -2322,6 +2159,13 @@
             <a:noFill/>
           </a:ln>
         </p:spPr>
+        <p:txBody>
+          <a:bodyPr/>
+          <a:lstStyle/>
+          <a:p>
+            <a:endParaRPr lang="en-US"/>
+          </a:p>
+        </p:txBody>
       </p:sp>
       <p:sp>
         <p:nvSpPr>
@@ -2612,7 +2456,7 @@
           <a:p>
             <a:fld id="{5BCAD085-E8A6-8845-BD4E-CB4CCA059FC4}" type="datetimeFigureOut">
               <a:rPr lang="en-US" smtClean="0"/>
-              <a:t>3/24/2026</a:t>
+              <a:t>4/1/2026</a:t>
             </a:fld>
             <a:endParaRPr lang="en-US"/>
           </a:p>
@@ -2716,6 +2560,13 @@
             <a:noFill/>
           </a:ln>
         </p:spPr>
+        <p:txBody>
+          <a:bodyPr/>
+          <a:lstStyle/>
+          <a:p>
+            <a:endParaRPr lang="en-US"/>
+          </a:p>
+        </p:txBody>
       </p:sp>
       <p:sp>
         <p:nvSpPr>
@@ -2867,7 +2718,7 @@
           <a:p>
             <a:fld id="{5BCAD085-E8A6-8845-BD4E-CB4CCA059FC4}" type="datetimeFigureOut">
               <a:rPr lang="en-US" smtClean="0"/>
-              <a:t>3/24/2026</a:t>
+              <a:t>4/1/2026</a:t>
             </a:fld>
             <a:endParaRPr lang="en-US"/>
           </a:p>
@@ -2971,6 +2822,13 @@
             <a:noFill/>
           </a:ln>
         </p:spPr>
+        <p:txBody>
+          <a:bodyPr/>
+          <a:lstStyle/>
+          <a:p>
+            <a:endParaRPr lang="en-US"/>
+          </a:p>
+        </p:txBody>
       </p:sp>
       <p:sp>
         <p:nvSpPr>
@@ -3127,7 +2985,7 @@
           <a:p>
             <a:fld id="{5BCAD085-E8A6-8845-BD4E-CB4CCA059FC4}" type="datetimeFigureOut">
               <a:rPr lang="en-US" smtClean="0"/>
-              <a:t>3/24/2026</a:t>
+              <a:t>4/1/2026</a:t>
             </a:fld>
             <a:endParaRPr lang="en-US"/>
           </a:p>
@@ -3231,6 +3089,13 @@
             <a:noFill/>
           </a:ln>
         </p:spPr>
+        <p:txBody>
+          <a:bodyPr/>
+          <a:lstStyle/>
+          <a:p>
+            <a:endParaRPr lang="en-US"/>
+          </a:p>
+        </p:txBody>
       </p:sp>
       <p:sp>
         <p:nvSpPr>
@@ -3387,7 +3252,7 @@
           <a:p>
             <a:fld id="{5BCAD085-E8A6-8845-BD4E-CB4CCA059FC4}" type="datetimeFigureOut">
               <a:rPr lang="en-US" smtClean="0"/>
-              <a:t>3/24/2026</a:t>
+              <a:t>4/1/2026</a:t>
             </a:fld>
             <a:endParaRPr lang="en-US"/>
           </a:p>
@@ -3491,6 +3356,13 @@
             <a:noFill/>
           </a:ln>
         </p:spPr>
+        <p:txBody>
+          <a:bodyPr/>
+          <a:lstStyle/>
+          <a:p>
+            <a:endParaRPr lang="en-US"/>
+          </a:p>
+        </p:txBody>
       </p:sp>
       <p:sp>
         <p:nvSpPr>
@@ -3714,7 +3586,7 @@
           <a:p>
             <a:fld id="{5BCAD085-E8A6-8845-BD4E-CB4CCA059FC4}" type="datetimeFigureOut">
               <a:rPr lang="en-US" smtClean="0"/>
-              <a:t>3/24/2026</a:t>
+              <a:t>4/1/2026</a:t>
             </a:fld>
             <a:endParaRPr lang="en-US"/>
           </a:p>
@@ -3818,6 +3690,13 @@
             <a:noFill/>
           </a:ln>
         </p:spPr>
+        <p:txBody>
+          <a:bodyPr/>
+          <a:lstStyle/>
+          <a:p>
+            <a:endParaRPr lang="en-US"/>
+          </a:p>
+        </p:txBody>
       </p:sp>
       <p:sp>
         <p:nvSpPr>
@@ -4035,7 +3914,7 @@
           <a:p>
             <a:fld id="{5BCAD085-E8A6-8845-BD4E-CB4CCA059FC4}" type="datetimeFigureOut">
               <a:rPr lang="en-US" smtClean="0"/>
-              <a:t>3/24/2026</a:t>
+              <a:t>4/1/2026</a:t>
             </a:fld>
             <a:endParaRPr lang="en-US"/>
           </a:p>
@@ -4139,6 +4018,13 @@
             <a:noFill/>
           </a:ln>
         </p:spPr>
+        <p:txBody>
+          <a:bodyPr/>
+          <a:lstStyle/>
+          <a:p>
+            <a:endParaRPr lang="en-US"/>
+          </a:p>
+        </p:txBody>
       </p:sp>
       <p:sp>
         <p:nvSpPr>
@@ -4490,7 +4376,7 @@
           <a:p>
             <a:fld id="{5BCAD085-E8A6-8845-BD4E-CB4CCA059FC4}" type="datetimeFigureOut">
               <a:rPr lang="en-US" smtClean="0"/>
-              <a:t>3/24/2026</a:t>
+              <a:t>4/1/2026</a:t>
             </a:fld>
             <a:endParaRPr lang="en-US"/>
           </a:p>
@@ -4594,6 +4480,13 @@
             <a:noFill/>
           </a:ln>
         </p:spPr>
+        <p:txBody>
+          <a:bodyPr/>
+          <a:lstStyle/>
+          <a:p>
+            <a:endParaRPr lang="en-US"/>
+          </a:p>
+        </p:txBody>
       </p:sp>
       <p:sp>
         <p:nvSpPr>
@@ -4698,7 +4591,7 @@
           <a:p>
             <a:fld id="{5BCAD085-E8A6-8845-BD4E-CB4CCA059FC4}" type="datetimeFigureOut">
               <a:rPr lang="en-US" smtClean="0"/>
-              <a:t>3/24/2026</a:t>
+              <a:t>4/1/2026</a:t>
             </a:fld>
             <a:endParaRPr lang="en-US"/>
           </a:p>
@@ -4802,6 +4695,13 @@
             <a:noFill/>
           </a:ln>
         </p:spPr>
+        <p:txBody>
+          <a:bodyPr/>
+          <a:lstStyle/>
+          <a:p>
+            <a:endParaRPr lang="en-US"/>
+          </a:p>
+        </p:txBody>
       </p:sp>
       <p:sp>
         <p:nvSpPr>
@@ -4873,7 +4773,7 @@
           <a:p>
             <a:fld id="{5BCAD085-E8A6-8845-BD4E-CB4CCA059FC4}" type="datetimeFigureOut">
               <a:rPr lang="en-US" smtClean="0"/>
-              <a:t>3/24/2026</a:t>
+              <a:t>4/1/2026</a:t>
             </a:fld>
             <a:endParaRPr lang="en-US"/>
           </a:p>
@@ -4977,6 +4877,13 @@
             <a:noFill/>
           </a:ln>
         </p:spPr>
+        <p:txBody>
+          <a:bodyPr/>
+          <a:lstStyle/>
+          <a:p>
+            <a:endParaRPr lang="en-US"/>
+          </a:p>
+        </p:txBody>
       </p:sp>
       <p:sp>
         <p:nvSpPr>
@@ -5204,7 +5111,7 @@
           <a:p>
             <a:fld id="{5BCAD085-E8A6-8845-BD4E-CB4CCA059FC4}" type="datetimeFigureOut">
               <a:rPr lang="en-US" smtClean="0"/>
-              <a:t>3/24/2026</a:t>
+              <a:t>4/1/2026</a:t>
             </a:fld>
             <a:endParaRPr lang="en-US"/>
           </a:p>
@@ -5308,6 +5215,13 @@
             <a:noFill/>
           </a:ln>
         </p:spPr>
+        <p:txBody>
+          <a:bodyPr/>
+          <a:lstStyle/>
+          <a:p>
+            <a:endParaRPr lang="en-US"/>
+          </a:p>
+        </p:txBody>
       </p:sp>
       <p:sp>
         <p:nvSpPr>
@@ -5547,7 +5461,7 @@
           <a:p>
             <a:fld id="{5BCAD085-E8A6-8845-BD4E-CB4CCA059FC4}" type="datetimeFigureOut">
               <a:rPr lang="en-US" smtClean="0"/>
-              <a:t>3/24/2026</a:t>
+              <a:t>4/1/2026</a:t>
             </a:fld>
             <a:endParaRPr lang="en-US"/>
           </a:p>
@@ -5651,6 +5565,13 @@
             <a:noFill/>
           </a:ln>
         </p:spPr>
+        <p:txBody>
+          <a:bodyPr/>
+          <a:lstStyle/>
+          <a:p>
+            <a:endParaRPr lang="en-US"/>
+          </a:p>
+        </p:txBody>
       </p:sp>
       <p:sp>
         <p:nvSpPr>
@@ -5789,6 +5710,13 @@
               <a:noFill/>
             </a:ln>
           </p:spPr>
+          <p:txBody>
+            <a:bodyPr/>
+            <a:lstStyle/>
+            <a:p>
+              <a:endParaRPr lang="en-US"/>
+            </a:p>
+          </p:txBody>
         </p:sp>
         <p:sp>
           <p:nvSpPr>
@@ -5855,6 +5783,13 @@
               <a:noFill/>
             </a:ln>
           </p:spPr>
+          <p:txBody>
+            <a:bodyPr/>
+            <a:lstStyle/>
+            <a:p>
+              <a:endParaRPr lang="en-US"/>
+            </a:p>
+          </p:txBody>
         </p:sp>
         <p:sp>
           <p:nvSpPr>
@@ -5926,6 +5861,13 @@
               <a:noFill/>
             </a:ln>
           </p:spPr>
+          <p:txBody>
+            <a:bodyPr/>
+            <a:lstStyle/>
+            <a:p>
+              <a:endParaRPr lang="en-US"/>
+            </a:p>
+          </p:txBody>
         </p:sp>
         <p:sp>
           <p:nvSpPr>
@@ -5977,6 +5919,13 @@
               <a:noFill/>
             </a:ln>
           </p:spPr>
+          <p:txBody>
+            <a:bodyPr/>
+            <a:lstStyle/>
+            <a:p>
+              <a:endParaRPr lang="en-US"/>
+            </a:p>
+          </p:txBody>
         </p:sp>
         <p:sp>
           <p:nvSpPr>
@@ -6063,6 +6012,13 @@
               <a:noFill/>
             </a:ln>
           </p:spPr>
+          <p:txBody>
+            <a:bodyPr/>
+            <a:lstStyle/>
+            <a:p>
+              <a:endParaRPr lang="en-US"/>
+            </a:p>
+          </p:txBody>
         </p:sp>
         <p:sp>
           <p:nvSpPr>
@@ -6144,6 +6100,13 @@
               <a:noFill/>
             </a:ln>
           </p:spPr>
+          <p:txBody>
+            <a:bodyPr/>
+            <a:lstStyle/>
+            <a:p>
+              <a:endParaRPr lang="en-US"/>
+            </a:p>
+          </p:txBody>
         </p:sp>
         <p:sp>
           <p:nvSpPr>
@@ -6205,6 +6168,13 @@
               <a:noFill/>
             </a:ln>
           </p:spPr>
+          <p:txBody>
+            <a:bodyPr/>
+            <a:lstStyle/>
+            <a:p>
+              <a:endParaRPr lang="en-US"/>
+            </a:p>
+          </p:txBody>
         </p:sp>
         <p:sp>
           <p:nvSpPr>
@@ -6286,6 +6256,13 @@
               <a:noFill/>
             </a:ln>
           </p:spPr>
+          <p:txBody>
+            <a:bodyPr/>
+            <a:lstStyle/>
+            <a:p>
+              <a:endParaRPr lang="en-US"/>
+            </a:p>
+          </p:txBody>
         </p:sp>
         <p:sp>
           <p:nvSpPr>
@@ -6402,6 +6379,13 @@
               <a:noFill/>
             </a:ln>
           </p:spPr>
+          <p:txBody>
+            <a:bodyPr/>
+            <a:lstStyle/>
+            <a:p>
+              <a:endParaRPr lang="en-US"/>
+            </a:p>
+          </p:txBody>
         </p:sp>
         <p:sp>
           <p:nvSpPr>
@@ -6453,6 +6437,13 @@
               <a:noFill/>
             </a:ln>
           </p:spPr>
+          <p:txBody>
+            <a:bodyPr/>
+            <a:lstStyle/>
+            <a:p>
+              <a:endParaRPr lang="en-US"/>
+            </a:p>
+          </p:txBody>
         </p:sp>
         <p:sp>
           <p:nvSpPr>
@@ -6514,6 +6505,13 @@
               <a:noFill/>
             </a:ln>
           </p:spPr>
+          <p:txBody>
+            <a:bodyPr/>
+            <a:lstStyle/>
+            <a:p>
+              <a:endParaRPr lang="en-US"/>
+            </a:p>
+          </p:txBody>
         </p:sp>
         <p:sp>
           <p:nvSpPr>
@@ -6585,6 +6583,13 @@
               <a:noFill/>
             </a:ln>
           </p:spPr>
+          <p:txBody>
+            <a:bodyPr/>
+            <a:lstStyle/>
+            <a:p>
+              <a:endParaRPr lang="en-US"/>
+            </a:p>
+          </p:txBody>
         </p:sp>
       </p:grpSp>
       <p:grpSp>
@@ -6704,6 +6709,13 @@
               <a:noFill/>
             </a:ln>
           </p:spPr>
+          <p:txBody>
+            <a:bodyPr/>
+            <a:lstStyle/>
+            <a:p>
+              <a:endParaRPr lang="en-US"/>
+            </a:p>
+          </p:txBody>
         </p:sp>
         <p:sp>
           <p:nvSpPr>
@@ -6773,6 +6785,13 @@
               <a:noFill/>
             </a:ln>
           </p:spPr>
+          <p:txBody>
+            <a:bodyPr/>
+            <a:lstStyle/>
+            <a:p>
+              <a:endParaRPr lang="en-US"/>
+            </a:p>
+          </p:txBody>
         </p:sp>
         <p:sp>
           <p:nvSpPr>
@@ -6842,6 +6861,13 @@
               <a:noFill/>
             </a:ln>
           </p:spPr>
+          <p:txBody>
+            <a:bodyPr/>
+            <a:lstStyle/>
+            <a:p>
+              <a:endParaRPr lang="en-US"/>
+            </a:p>
+          </p:txBody>
         </p:sp>
         <p:sp>
           <p:nvSpPr>
@@ -6926,6 +6952,13 @@
               <a:noFill/>
             </a:ln>
           </p:spPr>
+          <p:txBody>
+            <a:bodyPr/>
+            <a:lstStyle/>
+            <a:p>
+              <a:endParaRPr lang="en-US"/>
+            </a:p>
+          </p:txBody>
         </p:sp>
         <p:sp>
           <p:nvSpPr>
@@ -7020,6 +7053,13 @@
               <a:noFill/>
             </a:ln>
           </p:spPr>
+          <p:txBody>
+            <a:bodyPr/>
+            <a:lstStyle/>
+            <a:p>
+              <a:endParaRPr lang="en-US"/>
+            </a:p>
+          </p:txBody>
         </p:sp>
         <p:sp>
           <p:nvSpPr>
@@ -7069,6 +7109,13 @@
               <a:noFill/>
             </a:ln>
           </p:spPr>
+          <p:txBody>
+            <a:bodyPr/>
+            <a:lstStyle/>
+            <a:p>
+              <a:endParaRPr lang="en-US"/>
+            </a:p>
+          </p:txBody>
         </p:sp>
         <p:sp>
           <p:nvSpPr>
@@ -7133,6 +7180,13 @@
               <a:noFill/>
             </a:ln>
           </p:spPr>
+          <p:txBody>
+            <a:bodyPr/>
+            <a:lstStyle/>
+            <a:p>
+              <a:endParaRPr lang="en-US"/>
+            </a:p>
+          </p:txBody>
         </p:sp>
         <p:sp>
           <p:nvSpPr>
@@ -7242,6 +7296,13 @@
               <a:noFill/>
             </a:ln>
           </p:spPr>
+          <p:txBody>
+            <a:bodyPr/>
+            <a:lstStyle/>
+            <a:p>
+              <a:endParaRPr lang="en-US"/>
+            </a:p>
+          </p:txBody>
         </p:sp>
         <p:sp>
           <p:nvSpPr>
@@ -7291,6 +7352,13 @@
               <a:noFill/>
             </a:ln>
           </p:spPr>
+          <p:txBody>
+            <a:bodyPr/>
+            <a:lstStyle/>
+            <a:p>
+              <a:endParaRPr lang="en-US"/>
+            </a:p>
+          </p:txBody>
         </p:sp>
         <p:sp>
           <p:nvSpPr>
@@ -7360,6 +7428,13 @@
               <a:noFill/>
             </a:ln>
           </p:spPr>
+          <p:txBody>
+            <a:bodyPr/>
+            <a:lstStyle/>
+            <a:p>
+              <a:endParaRPr lang="en-US"/>
+            </a:p>
+          </p:txBody>
         </p:sp>
         <p:sp>
           <p:nvSpPr>
@@ -7424,6 +7499,13 @@
               <a:noFill/>
             </a:ln>
           </p:spPr>
+          <p:txBody>
+            <a:bodyPr/>
+            <a:lstStyle/>
+            <a:p>
+              <a:endParaRPr lang="en-US"/>
+            </a:p>
+          </p:txBody>
         </p:sp>
         <p:sp>
           <p:nvSpPr>
@@ -7493,6 +7575,13 @@
               <a:noFill/>
             </a:ln>
           </p:spPr>
+          <p:txBody>
+            <a:bodyPr/>
+            <a:lstStyle/>
+            <a:p>
+              <a:endParaRPr lang="en-US"/>
+            </a:p>
+          </p:txBody>
         </p:sp>
       </p:grpSp>
       <p:sp>
@@ -7531,6 +7620,13 @@
             <a:schemeClr val="lt1"/>
           </a:fontRef>
         </p:style>
+        <p:txBody>
+          <a:bodyPr/>
+          <a:lstStyle/>
+          <a:p>
+            <a:endParaRPr lang="en-US"/>
+          </a:p>
+        </p:txBody>
       </p:sp>
       <p:sp>
         <p:nvSpPr>
@@ -7662,7 +7758,7 @@
           <a:p>
             <a:fld id="{5BCAD085-E8A6-8845-BD4E-CB4CCA059FC4}" type="datetimeFigureOut">
               <a:rPr lang="en-US" smtClean="0"/>
-              <a:t>3/24/2026</a:t>
+              <a:t>4/1/2026</a:t>
             </a:fld>
             <a:endParaRPr lang="en-US"/>
           </a:p>
@@ -8219,15 +8315,7 @@
           <a:p>
             <a:r>
               <a:rPr lang="en-US" dirty="0"/>
-              <a:t>Prepared By: Kesha </a:t>
-            </a:r>
-            <a:r>
-              <a:rPr lang="en-US" dirty="0" err="1"/>
-              <a:t>oza</a:t>
-            </a:r>
-            <a:r>
-              <a:rPr lang="en-US" dirty="0"/>
-              <a:t>, Anita Burri</a:t>
+              <a:t>Prepared By: Kesha Oza, Anita Burri</a:t>
             </a:r>
           </a:p>
           <a:p>
@@ -8254,6 +8342,12 @@
             <a:r>
               <a:rPr lang="en-US" dirty="0"/>
               <a:t>Faculty Advisor: Dr. Robert Gilliland</a:t>
+            </a:r>
+          </a:p>
+          <a:p>
+            <a:r>
+              <a:rPr lang="en-US" dirty="0"/>
+              <a:t>Course Professor: Dr. Goerge Yu</a:t>
             </a:r>
           </a:p>
           <a:p>
@@ -9423,21 +9517,8 @@
           <a:p>
             <a:r>
               <a:rPr lang="fr-FR" dirty="0"/>
-              <a:t>Dimension tables </a:t>
-            </a:r>
-            <a:r>
-              <a:rPr lang="fr-FR" dirty="0" err="1"/>
-              <a:t>provide</a:t>
-            </a:r>
-            <a:r>
-              <a:rPr lang="fr-FR" dirty="0"/>
-              <a:t> descriptive </a:t>
-            </a:r>
-            <a:r>
-              <a:rPr lang="fr-FR" dirty="0" err="1"/>
-              <a:t>attributes</a:t>
-            </a:r>
-            <a:endParaRPr lang="fr-FR" dirty="0"/>
+              <a:t>Dimension tables provide descriptive attributes</a:t>
+            </a:r>
           </a:p>
           <a:p>
             <a:r>
@@ -9660,7 +9741,7 @@
               </a:lnSpc>
             </a:pPr>
             <a:r>
-              <a:rPr lang="en-US" sz="1300"/>
+              <a:rPr lang="en-US" sz="1300" dirty="0"/>
               <a:t>Data cleaned and transformed using staging table</a:t>
             </a:r>
           </a:p>
@@ -9671,7 +9752,7 @@
               </a:lnSpc>
             </a:pPr>
             <a:r>
-              <a:rPr lang="en-US" sz="1300"/>
+              <a:rPr lang="en-US" sz="1300" dirty="0"/>
               <a:t>Created fact and dimension tables in MySQL</a:t>
             </a:r>
           </a:p>
@@ -9682,7 +9763,7 @@
               </a:lnSpc>
             </a:pPr>
             <a:r>
-              <a:rPr lang="en-US" sz="1300"/>
+              <a:rPr lang="en-US" sz="1300" dirty="0"/>
               <a:t>Developed analytical SQL views for KPIs</a:t>
             </a:r>
           </a:p>
@@ -9693,7 +9774,7 @@
               </a:lnSpc>
             </a:pPr>
             <a:r>
-              <a:rPr lang="en-US" sz="1300"/>
+              <a:rPr lang="en-US" sz="1300" dirty="0"/>
               <a:t>Implemented inventory simulation logic</a:t>
             </a:r>
           </a:p>
@@ -9704,7 +9785,7 @@
               </a:lnSpc>
             </a:pPr>
             <a:r>
-              <a:rPr lang="en-US" sz="1300"/>
+              <a:rPr lang="en-US" sz="1300" dirty="0"/>
               <a:t>Used aggregation functions for store-level analysis</a:t>
             </a:r>
           </a:p>
@@ -9715,7 +9796,7 @@
               </a:lnSpc>
             </a:pPr>
             <a:r>
-              <a:rPr lang="en-US" sz="1300"/>
+              <a:rPr lang="en-US" sz="1300" dirty="0"/>
               <a:t>Added dynamic parameter for flexible inventory modeling</a:t>
             </a:r>
           </a:p>
@@ -9726,7 +9807,7 @@
               </a:lnSpc>
               <a:buNone/>
             </a:pPr>
-            <a:endParaRPr lang="en-US" sz="1300"/>
+            <a:endParaRPr lang="en-US" sz="1300" dirty="0"/>
           </a:p>
           <a:p>
             <a:pPr>
@@ -9735,7 +9816,7 @@
               </a:lnSpc>
             </a:pPr>
             <a:r>
-              <a:rPr lang="en-US" sz="1300"/>
+              <a:rPr lang="en-US" sz="1300" dirty="0"/>
               <a:t># Top 10 stores by total sales</a:t>
             </a:r>
           </a:p>
@@ -9747,30 +9828,9 @@
               <a:buNone/>
             </a:pPr>
             <a:r>
-              <a:rPr lang="en-US" sz="1300"/>
-              <a:t>	SELECT </a:t>
-            </a:r>
-            <a:r>
-              <a:rPr lang="en-US" sz="1300" err="1"/>
-              <a:t>store_id</a:t>
-            </a:r>
-            <a:r>
-              <a:rPr lang="en-US" sz="1300"/>
-              <a:t>, ROUND(SUM(</a:t>
-            </a:r>
-            <a:r>
-              <a:rPr lang="en-US" sz="1300" err="1"/>
-              <a:t>weekly_sales</a:t>
-            </a:r>
-            <a:r>
-              <a:rPr lang="en-US" sz="1300"/>
-              <a:t>), 2) AS 	</a:t>
-            </a:r>
-            <a:r>
-              <a:rPr lang="en-US" sz="1300" err="1"/>
-              <a:t>total_sales</a:t>
-            </a:r>
-            <a:endParaRPr lang="en-US" sz="1300"/>
+              <a:rPr lang="en-US" sz="1300" dirty="0"/>
+              <a:t>	SELECT store_id, ROUND(SUM(weekly_sales), 2) AS 	total_sales</a:t>
+            </a:r>
           </a:p>
           <a:p>
             <a:pPr marL="0" indent="0">
@@ -9780,14 +9840,9 @@
               <a:buNone/>
             </a:pPr>
             <a:r>
-              <a:rPr lang="en-US" sz="1300"/>
-              <a:t>	FROM </a:t>
-            </a:r>
-            <a:r>
-              <a:rPr lang="en-US" sz="1300" err="1"/>
-              <a:t>fact_sales</a:t>
-            </a:r>
-            <a:endParaRPr lang="en-US" sz="1300"/>
+              <a:rPr lang="en-US" sz="1300" dirty="0"/>
+              <a:t>	FROM fact_sales</a:t>
+            </a:r>
           </a:p>
           <a:p>
             <a:pPr marL="0" indent="0">
@@ -9797,14 +9852,9 @@
               <a:buNone/>
             </a:pPr>
             <a:r>
-              <a:rPr lang="en-US" sz="1300"/>
-              <a:t>	GROUP BY </a:t>
-            </a:r>
-            <a:r>
-              <a:rPr lang="en-US" sz="1300" err="1"/>
-              <a:t>store_id</a:t>
-            </a:r>
-            <a:endParaRPr lang="en-US" sz="1300"/>
+              <a:rPr lang="en-US" sz="1300" dirty="0"/>
+              <a:t>	GROUP BY store_id</a:t>
+            </a:r>
           </a:p>
           <a:p>
             <a:pPr marL="0" indent="0">
@@ -9814,16 +9864,8 @@
               <a:buNone/>
             </a:pPr>
             <a:r>
-              <a:rPr lang="en-US" sz="1300"/>
-              <a:t>	ORDER BY </a:t>
-            </a:r>
-            <a:r>
-              <a:rPr lang="en-US" sz="1300" err="1"/>
-              <a:t>total_sales</a:t>
-            </a:r>
-            <a:r>
-              <a:rPr lang="en-US" sz="1300"/>
-              <a:t> DESC</a:t>
+              <a:rPr lang="en-US" sz="1300" dirty="0"/>
+              <a:t>	ORDER BY total_sales DESC</a:t>
             </a:r>
           </a:p>
           <a:p>
@@ -9834,7 +9876,7 @@
               <a:buNone/>
             </a:pPr>
             <a:r>
-              <a:rPr lang="en-US" sz="1300"/>
+              <a:rPr lang="en-US" sz="1300" dirty="0"/>
               <a:t>	LIMIT 10;</a:t>
             </a:r>
           </a:p>

--- a/finalreports/retail_inventory_capstone.pptx
+++ b/finalreports/retail_inventory_capstone.pptx
@@ -138,7 +138,7 @@
 <file path=ppt/revisionInfo.xml><?xml version="1.0" encoding="utf-8"?>
 <p1510:revInfo xmlns:a="http://schemas.openxmlformats.org/drawingml/2006/main" xmlns:r="http://schemas.openxmlformats.org/officeDocument/2006/relationships" xmlns:p1510="http://schemas.microsoft.com/office/powerpoint/2015/10/main">
   <p1510:revLst>
-    <p1510:client id="{A2A82979-0415-4F66-A4C5-B1864EFBAFE5}" v="7" dt="2026-04-01T14:41:42.842"/>
+    <p1510:client id="{A2A82979-0415-4F66-A4C5-B1864EFBAFE5}" v="1" dt="2026-04-08T02:13:38.360"/>
   </p1510:revLst>
 </p1510:revInfo>
 </file>
@@ -453,6 +453,60 @@
       </pc:sldChg>
     </pc:docChg>
   </pc:docChgLst>
+  <pc:docChgLst>
+    <pc:chgData name="Kesha Oza" userId="9d53b8651bab0e02" providerId="LiveId" clId="{F99070D4-0EC4-40BF-9298-F753368A74B3}"/>
+    <pc:docChg chg="custSel modSld">
+      <pc:chgData name="Kesha Oza" userId="9d53b8651bab0e02" providerId="LiveId" clId="{F99070D4-0EC4-40BF-9298-F753368A74B3}" dt="2026-04-08T02:21:36.047" v="80" actId="27636"/>
+      <pc:docMkLst>
+        <pc:docMk/>
+      </pc:docMkLst>
+      <pc:sldChg chg="addSp delSp modSp mod delAnim">
+        <pc:chgData name="Kesha Oza" userId="9d53b8651bab0e02" providerId="LiveId" clId="{F99070D4-0EC4-40BF-9298-F753368A74B3}" dt="2026-04-08T02:17:42.684" v="78" actId="478"/>
+        <pc:sldMkLst>
+          <pc:docMk/>
+          <pc:sldMk cId="0" sldId="256"/>
+        </pc:sldMkLst>
+        <pc:picChg chg="add del mod">
+          <ac:chgData name="Kesha Oza" userId="9d53b8651bab0e02" providerId="LiveId" clId="{F99070D4-0EC4-40BF-9298-F753368A74B3}" dt="2026-04-08T02:17:42.684" v="78" actId="478"/>
+          <ac:picMkLst>
+            <pc:docMk/>
+            <pc:sldMk cId="0" sldId="256"/>
+            <ac:picMk id="15" creationId="{56A1184C-7B0F-9FDA-954A-50C7AAB7BE2F}"/>
+          </ac:picMkLst>
+        </pc:picChg>
+      </pc:sldChg>
+      <pc:sldChg chg="modSp mod">
+        <pc:chgData name="Kesha Oza" userId="9d53b8651bab0e02" providerId="LiveId" clId="{F99070D4-0EC4-40BF-9298-F753368A74B3}" dt="2026-04-08T02:16:22.851" v="77" actId="20577"/>
+        <pc:sldMkLst>
+          <pc:docMk/>
+          <pc:sldMk cId="0" sldId="257"/>
+        </pc:sldMkLst>
+        <pc:spChg chg="mod">
+          <ac:chgData name="Kesha Oza" userId="9d53b8651bab0e02" providerId="LiveId" clId="{F99070D4-0EC4-40BF-9298-F753368A74B3}" dt="2026-04-08T02:16:22.851" v="77" actId="20577"/>
+          <ac:spMkLst>
+            <pc:docMk/>
+            <pc:sldMk cId="0" sldId="257"/>
+            <ac:spMk id="3" creationId="{00000000-0000-0000-0000-000000000000}"/>
+          </ac:spMkLst>
+        </pc:spChg>
+      </pc:sldChg>
+      <pc:sldChg chg="modSp mod">
+        <pc:chgData name="Kesha Oza" userId="9d53b8651bab0e02" providerId="LiveId" clId="{F99070D4-0EC4-40BF-9298-F753368A74B3}" dt="2026-04-08T02:21:36.047" v="80" actId="27636"/>
+        <pc:sldMkLst>
+          <pc:docMk/>
+          <pc:sldMk cId="0" sldId="264"/>
+        </pc:sldMkLst>
+        <pc:spChg chg="mod">
+          <ac:chgData name="Kesha Oza" userId="9d53b8651bab0e02" providerId="LiveId" clId="{F99070D4-0EC4-40BF-9298-F753368A74B3}" dt="2026-04-08T02:21:36.047" v="80" actId="27636"/>
+          <ac:spMkLst>
+            <pc:docMk/>
+            <pc:sldMk cId="0" sldId="264"/>
+            <ac:spMk id="3" creationId="{00000000-0000-0000-0000-000000000000}"/>
+          </ac:spMkLst>
+        </pc:spChg>
+      </pc:sldChg>
+    </pc:docChg>
+  </pc:docChgLst>
 </pc:chgInfo>
 </file>
 
@@ -644,7 +698,7 @@
           <a:p>
             <a:fld id="{5BCAD085-E8A6-8845-BD4E-CB4CCA059FC4}" type="datetimeFigureOut">
               <a:rPr lang="en-US" smtClean="0"/>
-              <a:t>4/1/2026</a:t>
+              <a:t>4/7/2026</a:t>
             </a:fld>
             <a:endParaRPr lang="en-US"/>
           </a:p>
@@ -983,7 +1037,7 @@
           <a:p>
             <a:fld id="{5BCAD085-E8A6-8845-BD4E-CB4CCA059FC4}" type="datetimeFigureOut">
               <a:rPr lang="en-US" smtClean="0"/>
-              <a:t>4/1/2026</a:t>
+              <a:t>4/7/2026</a:t>
             </a:fld>
             <a:endParaRPr lang="en-US"/>
           </a:p>
@@ -1389,7 +1443,7 @@
           <a:p>
             <a:fld id="{5BCAD085-E8A6-8845-BD4E-CB4CCA059FC4}" type="datetimeFigureOut">
               <a:rPr lang="en-US" smtClean="0"/>
-              <a:t>4/1/2026</a:t>
+              <a:t>4/7/2026</a:t>
             </a:fld>
             <a:endParaRPr lang="en-US"/>
           </a:p>
@@ -1730,7 +1784,7 @@
           <a:p>
             <a:fld id="{5BCAD085-E8A6-8845-BD4E-CB4CCA059FC4}" type="datetimeFigureOut">
               <a:rPr lang="en-US" smtClean="0"/>
-              <a:t>4/1/2026</a:t>
+              <a:t>4/7/2026</a:t>
             </a:fld>
             <a:endParaRPr lang="en-US"/>
           </a:p>
@@ -2055,7 +2109,7 @@
           <a:p>
             <a:fld id="{5BCAD085-E8A6-8845-BD4E-CB4CCA059FC4}" type="datetimeFigureOut">
               <a:rPr lang="en-US" smtClean="0"/>
-              <a:t>4/1/2026</a:t>
+              <a:t>4/7/2026</a:t>
             </a:fld>
             <a:endParaRPr lang="en-US"/>
           </a:p>
@@ -2456,7 +2510,7 @@
           <a:p>
             <a:fld id="{5BCAD085-E8A6-8845-BD4E-CB4CCA059FC4}" type="datetimeFigureOut">
               <a:rPr lang="en-US" smtClean="0"/>
-              <a:t>4/1/2026</a:t>
+              <a:t>4/7/2026</a:t>
             </a:fld>
             <a:endParaRPr lang="en-US"/>
           </a:p>
@@ -2718,7 +2772,7 @@
           <a:p>
             <a:fld id="{5BCAD085-E8A6-8845-BD4E-CB4CCA059FC4}" type="datetimeFigureOut">
               <a:rPr lang="en-US" smtClean="0"/>
-              <a:t>4/1/2026</a:t>
+              <a:t>4/7/2026</a:t>
             </a:fld>
             <a:endParaRPr lang="en-US"/>
           </a:p>
@@ -2985,7 +3039,7 @@
           <a:p>
             <a:fld id="{5BCAD085-E8A6-8845-BD4E-CB4CCA059FC4}" type="datetimeFigureOut">
               <a:rPr lang="en-US" smtClean="0"/>
-              <a:t>4/1/2026</a:t>
+              <a:t>4/7/2026</a:t>
             </a:fld>
             <a:endParaRPr lang="en-US"/>
           </a:p>
@@ -3252,7 +3306,7 @@
           <a:p>
             <a:fld id="{5BCAD085-E8A6-8845-BD4E-CB4CCA059FC4}" type="datetimeFigureOut">
               <a:rPr lang="en-US" smtClean="0"/>
-              <a:t>4/1/2026</a:t>
+              <a:t>4/7/2026</a:t>
             </a:fld>
             <a:endParaRPr lang="en-US"/>
           </a:p>
@@ -3586,7 +3640,7 @@
           <a:p>
             <a:fld id="{5BCAD085-E8A6-8845-BD4E-CB4CCA059FC4}" type="datetimeFigureOut">
               <a:rPr lang="en-US" smtClean="0"/>
-              <a:t>4/1/2026</a:t>
+              <a:t>4/7/2026</a:t>
             </a:fld>
             <a:endParaRPr lang="en-US"/>
           </a:p>
@@ -3914,7 +3968,7 @@
           <a:p>
             <a:fld id="{5BCAD085-E8A6-8845-BD4E-CB4CCA059FC4}" type="datetimeFigureOut">
               <a:rPr lang="en-US" smtClean="0"/>
-              <a:t>4/1/2026</a:t>
+              <a:t>4/7/2026</a:t>
             </a:fld>
             <a:endParaRPr lang="en-US"/>
           </a:p>
@@ -4376,7 +4430,7 @@
           <a:p>
             <a:fld id="{5BCAD085-E8A6-8845-BD4E-CB4CCA059FC4}" type="datetimeFigureOut">
               <a:rPr lang="en-US" smtClean="0"/>
-              <a:t>4/1/2026</a:t>
+              <a:t>4/7/2026</a:t>
             </a:fld>
             <a:endParaRPr lang="en-US"/>
           </a:p>
@@ -4591,7 +4645,7 @@
           <a:p>
             <a:fld id="{5BCAD085-E8A6-8845-BD4E-CB4CCA059FC4}" type="datetimeFigureOut">
               <a:rPr lang="en-US" smtClean="0"/>
-              <a:t>4/1/2026</a:t>
+              <a:t>4/7/2026</a:t>
             </a:fld>
             <a:endParaRPr lang="en-US"/>
           </a:p>
@@ -4773,7 +4827,7 @@
           <a:p>
             <a:fld id="{5BCAD085-E8A6-8845-BD4E-CB4CCA059FC4}" type="datetimeFigureOut">
               <a:rPr lang="en-US" smtClean="0"/>
-              <a:t>4/1/2026</a:t>
+              <a:t>4/7/2026</a:t>
             </a:fld>
             <a:endParaRPr lang="en-US"/>
           </a:p>
@@ -5111,7 +5165,7 @@
           <a:p>
             <a:fld id="{5BCAD085-E8A6-8845-BD4E-CB4CCA059FC4}" type="datetimeFigureOut">
               <a:rPr lang="en-US" smtClean="0"/>
-              <a:t>4/1/2026</a:t>
+              <a:t>4/7/2026</a:t>
             </a:fld>
             <a:endParaRPr lang="en-US"/>
           </a:p>
@@ -5461,7 +5515,7 @@
           <a:p>
             <a:fld id="{5BCAD085-E8A6-8845-BD4E-CB4CCA059FC4}" type="datetimeFigureOut">
               <a:rPr lang="en-US" smtClean="0"/>
-              <a:t>4/1/2026</a:t>
+              <a:t>4/7/2026</a:t>
             </a:fld>
             <a:endParaRPr lang="en-US"/>
           </a:p>
@@ -7758,7 +7812,7 @@
           <a:p>
             <a:fld id="{5BCAD085-E8A6-8845-BD4E-CB4CCA059FC4}" type="datetimeFigureOut">
               <a:rPr lang="en-US" smtClean="0"/>
-              <a:t>4/1/2026</a:t>
+              <a:t>4/7/2026</a:t>
             </a:fld>
             <a:endParaRPr lang="en-US"/>
           </a:p>
@@ -8364,6 +8418,14 @@
   <p:clrMapOvr>
     <a:masterClrMapping/>
   </p:clrMapOvr>
+  <mc:AlternateContent xmlns:mc="http://schemas.openxmlformats.org/markup-compatibility/2006" xmlns:p14="http://schemas.microsoft.com/office/powerpoint/2010/main">
+    <mc:Choice Requires="p14">
+      <p:transition spd="slow" p14:dur="2000" advTm="8397"/>
+    </mc:Choice>
+    <mc:Fallback xmlns="">
+      <p:transition spd="slow" advTm="8397"/>
+    </mc:Fallback>
+  </mc:AlternateContent>
 </p:sld>
 </file>
 
@@ -8954,6 +9016,12 @@
           <a:p>
             <a:r>
               <a:rPr lang="en-US" dirty="0"/>
+              <a:t>Products unavailability impacts business performance</a:t>
+            </a:r>
+          </a:p>
+          <a:p>
+            <a:r>
+              <a:rPr lang="en-US" dirty="0"/>
               <a:t>Demand fluctuations make inventory management challenging</a:t>
             </a:r>
           </a:p>
@@ -8964,10 +9032,7 @@
             </a:r>
           </a:p>
           <a:p>
-            <a:r>
-              <a:rPr lang="en-US" dirty="0"/>
-              <a:t>Data analytics helps optimize inventory decisions</a:t>
-            </a:r>
+            <a:endParaRPr lang="en-US" dirty="0"/>
           </a:p>
         </p:txBody>
       </p:sp>
@@ -9954,7 +10019,7 @@
         </p:spPr>
         <p:txBody>
           <a:bodyPr>
-            <a:normAutofit lnSpcReduction="10000"/>
+            <a:normAutofit/>
           </a:bodyPr>
           <a:lstStyle/>
           <a:p>
@@ -9973,12 +10038,6 @@
             <a:r>
               <a:rPr lang="en-US" dirty="0"/>
               <a:t>Compared lost sales across stores</a:t>
-            </a:r>
-          </a:p>
-          <a:p>
-            <a:r>
-              <a:rPr lang="en-US" dirty="0"/>
-              <a:t>Evaluated store-level performance variations</a:t>
             </a:r>
           </a:p>
           <a:p>
